--- a/test/generator/baseline/gen.epub.to.pptx.pptx
+++ b/test/generator/baseline/gen.epub.to.pptx.pptx
@@ -429,8 +429,8 @@
             <a:tbl>
               <a:tblPr firstRow="1"/>
               <a:tblGrid>
-                <a:gridCol w="2244436"/>
-                <a:gridCol w="5985164"/>
+                <a:gridCol w="748145"/>
+                <a:gridCol w="7481455"/>
               </a:tblGrid>
               <a:tr h="3683000">
                 <a:tc>
@@ -443,20 +443,14 @@
                       </a:pPr>
                       <a:r>
                         <a:rPr lang="en-US" sz="1200" dirty="0"/>
-                        <a:t>One</a:t>
+                        <a:t>	</a:t>
                       </a:r>
-                      <a:r>
-                        <a:rPr lang="en-US" sz="1200" dirty="0"/>
-                        <a:t>Three</a:t>
-                      </a:r>
-                      <a:r>
-                        <a:rPr lang="en-US" sz="1200" dirty="0"/>
-                        <a:t>Two</a:t>
-                      </a:r>
-                      <a:r>
-                        <a:rPr lang="en-US" sz="1200" dirty="0"/>
-                        <a:t>Four</a:t>
-                      </a:r>
+                      <a:endParaRPr lang="en-US" sz="1200" dirty="0"/>
+                    </a:p>
+                    <a:p>
+                      <a:pPr>
+                        <a:buNone/>
+                      </a:pPr>
                       <a:endParaRPr lang="en-US" sz="1200" dirty="0"/>
                     </a:p>
                   </a:txBody>

--- a/test/generator/baseline/gen.epub.to.pptx.pptx
+++ b/test/generator/baseline/gen.epub.to.pptx.pptx
@@ -8801,7 +8801,7 @@
       </p:sp>
       <p:pic>
         <p:nvPicPr>
-          <p:cNvPr id="3" name="Picture 3"/>
+          <p:cNvPr id="3" name="Picture 3" descr="165 Inspirational Quotes To Keep You Motivated In Life"/>
           <p:cNvPicPr>
             <a:picLocks noChangeAspect="1"/>
           </p:cNvPicPr>
@@ -9221,9 +9221,12 @@
           <a:lstStyle/>
           <a:p>
             <a:pPr marL="228600" indent="-177800">
-              <a:buFont typeface="+mj-lt"/>
-              <a:buAutoNum type="arabicPeriod"/>
+              <a:buNone/>
             </a:pPr>
+            <a:r>
+              <a:rPr lang="en-US" sz="1800" dirty="0"/>
+              <a:t>1.	</a:t>
+            </a:r>
             <a:r>
               <a:rPr lang="en-US" sz="1800" dirty="0"/>
               <a:t>One, with a very long line to demonstrate that the hanging indent for the list is working correctly</a:t>
@@ -9232,9 +9235,12 @@
           </a:p>
           <a:p>
             <a:pPr marL="228600" indent="-177800">
-              <a:buFont typeface="+mj-lt"/>
-              <a:buAutoNum type="arabicPeriod"/>
+              <a:buNone/>
             </a:pPr>
+            <a:r>
+              <a:rPr lang="en-US" sz="1800" dirty="0"/>
+              <a:t>2.	</a:t>
+            </a:r>
             <a:r>
               <a:rPr lang="en-US" sz="1800" dirty="0"/>
               <a:t>Two</a:t>
@@ -9330,9 +9336,12 @@
           <a:lstStyle/>
           <a:p>
             <a:pPr marL="228600" indent="-177800">
-              <a:buFont typeface="+mj-lt"/>
-              <a:buAutoNum type="arabicPeriod"/>
+              <a:buNone/>
             </a:pPr>
+            <a:r>
+              <a:rPr lang="en-US" sz="1800" dirty="0"/>
+              <a:t>1.	</a:t>
+            </a:r>
             <a:r>
               <a:rPr lang="en-US" sz="1800" dirty="0"/>
               <a:t>One</a:t>
@@ -9381,9 +9390,12 @@
           </a:p>
           <a:p>
             <a:pPr marL="228600" indent="-177800">
-              <a:buFont typeface="+mj-lt"/>
-              <a:buAutoNum type="arabicPeriod"/>
+              <a:buNone/>
             </a:pPr>
+            <a:r>
+              <a:rPr lang="en-US" sz="1800" dirty="0"/>
+              <a:t>2.	</a:t>
+            </a:r>
             <a:r>
               <a:rPr lang="en-US" sz="1800" dirty="0"/>
               <a:t>Six</a:t>
@@ -9631,9 +9643,12 @@
           <a:lstStyle/>
           <a:p>
             <a:pPr marL="228600" indent="-177800">
-              <a:buFont typeface="+mj-lt"/>
-              <a:buAutoNum type="arabicPeriod"/>
+              <a:buNone/>
             </a:pPr>
+            <a:r>
+              <a:rPr lang="en-US" sz="1800" dirty="0"/>
+              <a:t>1.	</a:t>
+            </a:r>
             <a:r>
               <a:rPr lang="en-US" sz="1800" dirty="0"/>
               <a:t>One</a:t>
@@ -9642,9 +9657,12 @@
           </a:p>
           <a:p>
             <a:pPr marL="228600" indent="-177800">
-              <a:buFont typeface="+mj-lt"/>
-              <a:buAutoNum type="arabicPeriod"/>
+              <a:buNone/>
             </a:pPr>
+            <a:r>
+              <a:rPr lang="en-US" sz="1800" dirty="0"/>
+              <a:t>2.	</a:t>
+            </a:r>
             <a:r>
               <a:rPr lang="en-US" sz="1800" dirty="0"/>
               <a:t>Two</a:t>
@@ -9663,9 +9681,12 @@
           </a:p>
           <a:p>
             <a:pPr marL="228600" indent="-177800">
-              <a:buFont typeface="+mj-lt"/>
-              <a:buAutoNum type="arabicPeriod"/>
+              <a:buNone/>
             </a:pPr>
+            <a:r>
+              <a:rPr lang="en-US" sz="1800" dirty="0"/>
+              <a:t>3.	</a:t>
+            </a:r>
             <a:r>
               <a:rPr lang="en-US" sz="1800" dirty="0"/>
               <a:t>We now resume our normal programming</a:t>
@@ -9674,9 +9695,12 @@
           </a:p>
           <a:p>
             <a:pPr marL="228600" indent="-177800">
-              <a:buFont typeface="+mj-lt"/>
-              <a:buAutoNum type="arabicPeriod"/>
+              <a:buNone/>
             </a:pPr>
+            <a:r>
+              <a:rPr lang="en-US" sz="1800" dirty="0"/>
+              <a:t>4.	</a:t>
+            </a:r>
             <a:r>
               <a:rPr lang="en-US" sz="1800" dirty="0"/>
               <a:t>Four</a:t>

--- a/test/generator/baseline/gen.epub.to.pptx.pptx
+++ b/test/generator/baseline/gen.epub.to.pptx.pptx
@@ -7664,7 +7664,9 @@
               <a:t>Footnotes</a:t>
             </a:r>
             <a:r>
-              <a:rPr lang="en-US" sz="1800" baseline="30000" dirty="0"/>
+              <a:rPr lang="en-US" sz="1800" baseline="30000" dirty="0">
+                <a:hlinkClick r:id="rId2"/>
+              </a:rPr>
               <a:t>1</a:t>
             </a:r>
             <a:r>
@@ -7672,7 +7674,9 @@
               <a:t> and endnotes</a:t>
             </a:r>
             <a:r>
-              <a:rPr lang="en-US" sz="1800" baseline="30000" dirty="0"/>
+              <a:rPr lang="en-US" sz="1800" baseline="30000" dirty="0">
+                <a:hlinkClick r:id="rId3"/>
+              </a:rPr>
               <a:t>2</a:t>
             </a:r>
             <a:r>
@@ -7894,7 +7898,9 @@
               <a:t>. Then we have a link that points back to the section on </a:t>
             </a:r>
             <a:r>
-              <a:rPr lang="en-US" sz="1800" dirty="0"/>
+              <a:rPr lang="en-US" sz="1800" dirty="0">
+                <a:hlinkClick r:id="rId3"/>
+              </a:rPr>
               <a:t>paragraph level formatting</a:t>
             </a:r>
             <a:r>
@@ -8005,15 +8011,21 @@
               <a:buNone/>
             </a:pPr>
             <a:r>
-              <a:rPr lang="en-US" sz="1800" dirty="0"/>
+              <a:rPr lang="en-US" sz="1800" dirty="0">
+                <a:hlinkClick r:id="rId2"/>
+              </a:rPr>
               <a:t>Demonstration of DOCX support in calibre</a:t>
             </a:r>
             <a:r>
-              <a:rPr lang="en-US" sz="1800" dirty="0"/>
+              <a:rPr lang="en-US" sz="1800" dirty="0">
+                <a:hlinkClick r:id="rId3"/>
+              </a:rPr>
               <a:t> </a:t>
             </a:r>
             <a:r>
-              <a:rPr lang="en-US" sz="1800" dirty="0"/>
+              <a:rPr lang="en-US" sz="1800" dirty="0">
+                <a:hlinkClick r:id="rId4"/>
+              </a:rPr>
               <a:t>1</a:t>
             </a:r>
             <a:endParaRPr lang="en-US" sz="1800" dirty="0"/>
@@ -8023,15 +8035,21 @@
               <a:buNone/>
             </a:pPr>
             <a:r>
-              <a:rPr lang="en-US" sz="1800" dirty="0"/>
+              <a:rPr lang="en-US" sz="1800" dirty="0">
+                <a:hlinkClick r:id="rId5"/>
+              </a:rPr>
               <a:t>Text Formatting</a:t>
             </a:r>
             <a:r>
-              <a:rPr lang="en-US" sz="1800" dirty="0"/>
+              <a:rPr lang="en-US" sz="1800" dirty="0">
+                <a:hlinkClick r:id="rId6"/>
+              </a:rPr>
               <a:t> </a:t>
             </a:r>
             <a:r>
-              <a:rPr lang="en-US" sz="1800" dirty="0"/>
+              <a:rPr lang="en-US" sz="1800" dirty="0">
+                <a:hlinkClick r:id="rId7"/>
+              </a:rPr>
               <a:t>1</a:t>
             </a:r>
             <a:endParaRPr lang="en-US" sz="1800" dirty="0"/>
@@ -8041,15 +8059,21 @@
               <a:buNone/>
             </a:pPr>
             <a:r>
-              <a:rPr lang="en-US" sz="1800" dirty="0"/>
+              <a:rPr lang="en-US" sz="1800" dirty="0">
+                <a:hlinkClick r:id="rId8"/>
+              </a:rPr>
               <a:t>Inline formatting</a:t>
             </a:r>
             <a:r>
-              <a:rPr lang="en-US" sz="1800" dirty="0"/>
+              <a:rPr lang="en-US" sz="1800" dirty="0">
+                <a:hlinkClick r:id="rId9"/>
+              </a:rPr>
               <a:t> </a:t>
             </a:r>
             <a:r>
-              <a:rPr lang="en-US" sz="1800" dirty="0"/>
+              <a:rPr lang="en-US" sz="1800" dirty="0">
+                <a:hlinkClick r:id="rId10"/>
+              </a:rPr>
               <a:t>2</a:t>
             </a:r>
             <a:endParaRPr lang="en-US" sz="1800" dirty="0"/>
@@ -8059,15 +8083,21 @@
               <a:buNone/>
             </a:pPr>
             <a:r>
-              <a:rPr lang="en-US" sz="1800" dirty="0"/>
+              <a:rPr lang="en-US" sz="1800" dirty="0">
+                <a:hlinkClick r:id="rId11"/>
+              </a:rPr>
               <a:t>Fun with fonts</a:t>
             </a:r>
             <a:r>
-              <a:rPr lang="en-US" sz="1800" dirty="0"/>
+              <a:rPr lang="en-US" sz="1800" dirty="0">
+                <a:hlinkClick r:id="rId12"/>
+              </a:rPr>
               <a:t> </a:t>
             </a:r>
             <a:r>
-              <a:rPr lang="en-US" sz="1800" dirty="0"/>
+              <a:rPr lang="en-US" sz="1800" dirty="0">
+                <a:hlinkClick r:id="rId13"/>
+              </a:rPr>
               <a:t>2</a:t>
             </a:r>
             <a:endParaRPr lang="en-US" sz="1800" dirty="0"/>
@@ -8077,15 +8107,21 @@
               <a:buNone/>
             </a:pPr>
             <a:r>
-              <a:rPr lang="en-US" sz="1800" dirty="0"/>
+              <a:rPr lang="en-US" sz="1800" dirty="0">
+                <a:hlinkClick r:id="rId14"/>
+              </a:rPr>
               <a:t>Paragraph level formatting</a:t>
             </a:r>
             <a:r>
-              <a:rPr lang="en-US" sz="1800" dirty="0"/>
+              <a:rPr lang="en-US" sz="1800" dirty="0">
+                <a:hlinkClick r:id="rId15"/>
+              </a:rPr>
               <a:t> </a:t>
             </a:r>
             <a:r>
-              <a:rPr lang="en-US" sz="1800" dirty="0"/>
+              <a:rPr lang="en-US" sz="1800" dirty="0">
+                <a:hlinkClick r:id="rId16"/>
+              </a:rPr>
               <a:t>2</a:t>
             </a:r>
             <a:endParaRPr lang="en-US" sz="1800" dirty="0"/>
@@ -8095,15 +8131,21 @@
               <a:buNone/>
             </a:pPr>
             <a:r>
-              <a:rPr lang="en-US" sz="1800" dirty="0"/>
+              <a:rPr lang="en-US" sz="1800" dirty="0">
+                <a:hlinkClick r:id="rId17"/>
+              </a:rPr>
               <a:t>Tables</a:t>
             </a:r>
             <a:r>
-              <a:rPr lang="en-US" sz="1800" dirty="0"/>
+              <a:rPr lang="en-US" sz="1800" dirty="0">
+                <a:hlinkClick r:id="rId18"/>
+              </a:rPr>
               <a:t> </a:t>
             </a:r>
             <a:r>
-              <a:rPr lang="en-US" sz="1800" dirty="0"/>
+              <a:rPr lang="en-US" sz="1800" dirty="0">
+                <a:hlinkClick r:id="rId19"/>
+              </a:rPr>
               <a:t>2</a:t>
             </a:r>
             <a:endParaRPr lang="en-US" sz="1800" dirty="0"/>
@@ -8536,15 +8578,21 @@
               <a:buNone/>
             </a:pPr>
             <a:r>
-              <a:rPr lang="en-US" sz="1800" dirty="0"/>
+              <a:rPr lang="en-US" sz="1800" dirty="0">
+                <a:hlinkClick r:id="rId2"/>
+              </a:rPr>
               <a:t>Images</a:t>
             </a:r>
             <a:r>
-              <a:rPr lang="en-US" sz="1800" dirty="0"/>
+              <a:rPr lang="en-US" sz="1800" dirty="0">
+                <a:hlinkClick r:id="rId3"/>
+              </a:rPr>
               <a:t> </a:t>
             </a:r>
             <a:r>
-              <a:rPr lang="en-US" sz="1800" dirty="0"/>
+              <a:rPr lang="en-US" sz="1800" dirty="0">
+                <a:hlinkClick r:id="rId4"/>
+              </a:rPr>
               <a:t>6</a:t>
             </a:r>
             <a:endParaRPr lang="en-US" sz="1800" dirty="0"/>
@@ -8554,15 +8602,21 @@
               <a:buNone/>
             </a:pPr>
             <a:r>
-              <a:rPr lang="en-US" sz="1800" dirty="0"/>
+              <a:rPr lang="en-US" sz="1800" dirty="0">
+                <a:hlinkClick r:id="rId5"/>
+              </a:rPr>
               <a:t>Lists</a:t>
             </a:r>
             <a:r>
-              <a:rPr lang="en-US" sz="1800" dirty="0"/>
+              <a:rPr lang="en-US" sz="1800" dirty="0">
+                <a:hlinkClick r:id="rId6"/>
+              </a:rPr>
               <a:t> </a:t>
             </a:r>
             <a:r>
-              <a:rPr lang="en-US" sz="1800" dirty="0"/>
+              <a:rPr lang="en-US" sz="1800" dirty="0">
+                <a:hlinkClick r:id="rId7"/>
+              </a:rPr>
               <a:t>7</a:t>
             </a:r>
             <a:endParaRPr lang="en-US" sz="1800" dirty="0"/>
@@ -8572,15 +8626,21 @@
               <a:buNone/>
             </a:pPr>
             <a:r>
-              <a:rPr lang="en-US" sz="1800" dirty="0"/>
+              <a:rPr lang="en-US" sz="1800" dirty="0">
+                <a:hlinkClick r:id="rId8"/>
+              </a:rPr>
               <a:t>Bulleted List</a:t>
             </a:r>
             <a:r>
-              <a:rPr lang="en-US" sz="1800" dirty="0"/>
+              <a:rPr lang="en-US" sz="1800" dirty="0">
+                <a:hlinkClick r:id="rId9"/>
+              </a:rPr>
               <a:t> </a:t>
             </a:r>
             <a:r>
-              <a:rPr lang="en-US" sz="1800" dirty="0"/>
+              <a:rPr lang="en-US" sz="1800" dirty="0">
+                <a:hlinkClick r:id="rId10"/>
+              </a:rPr>
               <a:t>8</a:t>
             </a:r>
             <a:endParaRPr lang="en-US" sz="1800" dirty="0"/>
@@ -8590,15 +8650,21 @@
               <a:buNone/>
             </a:pPr>
             <a:r>
-              <a:rPr lang="en-US" sz="1800" dirty="0"/>
+              <a:rPr lang="en-US" sz="1800" dirty="0">
+                <a:hlinkClick r:id="rId11"/>
+              </a:rPr>
               <a:t>Numbered List</a:t>
             </a:r>
             <a:r>
-              <a:rPr lang="en-US" sz="1800" dirty="0"/>
+              <a:rPr lang="en-US" sz="1800" dirty="0">
+                <a:hlinkClick r:id="rId12"/>
+              </a:rPr>
               <a:t> </a:t>
             </a:r>
             <a:r>
-              <a:rPr lang="en-US" sz="1800" dirty="0"/>
+              <a:rPr lang="en-US" sz="1800" dirty="0">
+                <a:hlinkClick r:id="rId13"/>
+              </a:rPr>
               <a:t>8</a:t>
             </a:r>
             <a:endParaRPr lang="en-US" sz="1800" dirty="0"/>
@@ -8608,15 +8674,21 @@
               <a:buNone/>
             </a:pPr>
             <a:r>
-              <a:rPr lang="en-US" sz="1800" dirty="0"/>
+              <a:rPr lang="en-US" sz="1800" dirty="0">
+                <a:hlinkClick r:id="rId14"/>
+              </a:rPr>
               <a:t>Multi-level Lists</a:t>
             </a:r>
             <a:r>
-              <a:rPr lang="en-US" sz="1800" dirty="0"/>
+              <a:rPr lang="en-US" sz="1800" dirty="0">
+                <a:hlinkClick r:id="rId15"/>
+              </a:rPr>
               <a:t> </a:t>
             </a:r>
             <a:r>
-              <a:rPr lang="en-US" sz="1800" dirty="0"/>
+              <a:rPr lang="en-US" sz="1800" dirty="0">
+                <a:hlinkClick r:id="rId16"/>
+              </a:rPr>
               <a:t>8</a:t>
             </a:r>
             <a:endParaRPr lang="en-US" sz="1800" dirty="0"/>
@@ -8626,15 +8698,21 @@
               <a:buNone/>
             </a:pPr>
             <a:r>
-              <a:rPr lang="en-US" sz="1800" dirty="0"/>
+              <a:rPr lang="en-US" sz="1800" dirty="0">
+                <a:hlinkClick r:id="rId17"/>
+              </a:rPr>
               <a:t>Continued Lists</a:t>
             </a:r>
             <a:r>
-              <a:rPr lang="en-US" sz="1800" dirty="0"/>
+              <a:rPr lang="en-US" sz="1800" dirty="0">
+                <a:hlinkClick r:id="rId18"/>
+              </a:rPr>
               <a:t> </a:t>
             </a:r>
             <a:r>
-              <a:rPr lang="en-US" sz="1800" dirty="0"/>
+              <a:rPr lang="en-US" sz="1800" dirty="0">
+                <a:hlinkClick r:id="rId19"/>
+              </a:rPr>
               <a:t>8</a:t>
             </a:r>
             <a:endParaRPr lang="en-US" sz="1800" dirty="0"/>
@@ -9908,7 +9986,9 @@
               <a:t>[</a:t>
             </a:r>
             <a:r>
-              <a:rPr lang="en-US" sz="1800" dirty="0"/>
+              <a:rPr lang="en-US" sz="1800" dirty="0">
+                <a:hlinkClick r:id="rId2"/>
+              </a:rPr>
               <a:t>←1</a:t>
             </a:r>
             <a:r>
@@ -9936,7 +10016,9 @@
               <a:t>[</a:t>
             </a:r>
             <a:r>
-              <a:rPr lang="en-US" sz="1800" dirty="0"/>
+              <a:rPr lang="en-US" sz="1800" dirty="0">
+                <a:hlinkClick r:id="rId3"/>
+              </a:rPr>
               <a:t>←2</a:t>
             </a:r>
             <a:r>
